--- a/assets/figures-editable/c3-c4/c3-e04.pptx
+++ b/assets/figures-editable/c3-c4/c3-e04.pptx
@@ -3104,8 +3104,8 @@
         </p:nvSpPr>
         <p:spPr>
           <a:xfrm>
-            <a:off x="274320" y="137160"/>
-            <a:ext cx="11612880" cy="365760"/>
+            <a:off x="274320" y="118872"/>
+            <a:ext cx="11612880" cy="340105"/>
           </a:xfrm>
           <a:prstGeom prst="rect">
             <a:avLst/>
@@ -3114,7 +3114,7 @@
           <a:effectLst/>
         </p:spPr>
         <p:txBody>
-          <a:bodyPr wrap="square" lIns="27432" rIns="27432" tIns="18288" bIns="18288" anchor="ctr">
+          <a:bodyPr wrap="none" lIns="18288" rIns="18288" tIns="18288" bIns="18288" anchor="t">
             <a:spAutoFit/>
           </a:bodyPr>
           <a:lstStyle/>
@@ -3125,7 +3125,7 @@
               </a:spcAft>
             </a:pPr>
             <a:r>
-              <a:rPr sz="2100" b="0" i="0">
+              <a:rPr sz="1900" b="1" i="0">
                 <a:solidFill>
                   <a:srgbClr val="8EDBD4"/>
                 </a:solidFill>
@@ -3136,23 +3136,20 @@
           </a:p>
         </p:txBody>
       </p:sp>
-      <p:sp>
-        <p:nvSpPr>
-          <p:cNvPr id="3" name="C3-E04 ellipse 1" descr="sci-ppt:o001"/>
-          <p:cNvSpPr/>
+      <p:cxnSp>
+        <p:nvCxnSpPr>
+          <p:cNvPr id="3" name="C3-E04 line 1" descr="sci-ppt:o001"/>
+          <p:cNvCxnSpPr/>
           <p:nvPr/>
-        </p:nvSpPr>
-        <p:spPr>
-          <a:xfrm>
-            <a:off x="1417319" y="1280160"/>
-            <a:ext cx="1554480" cy="1554480"/>
-          </a:xfrm>
-          <a:prstGeom prst="ellipse">
+        </p:nvCxnSpPr>
+        <p:spPr>
+          <a:xfrm>
+            <a:off x="6949440" y="5029200"/>
+            <a:ext cx="4754880" cy="0"/>
+          </a:xfrm>
+          <a:prstGeom prst="line">
             <a:avLst/>
           </a:prstGeom>
-          <a:solidFill>
-            <a:srgbClr val="213E4B"/>
-          </a:solidFill>
           <a:ln w="19050">
             <a:solidFill>
               <a:srgbClr val="B4C7D2"/>
@@ -3160,31 +3157,21 @@
           </a:ln>
           <a:effectLst/>
         </p:spPr>
-        <p:txBody>
-          <a:bodyPr rtlCol="0" anchor="ctr"/>
-          <a:lstStyle/>
-          <a:p>
-            <a:pPr algn="ctr"/>
-          </a:p>
-        </p:txBody>
-      </p:sp>
-      <p:sp>
-        <p:nvSpPr>
-          <p:cNvPr id="4" name="C3-E04 ellipse 2" descr="sci-ppt:o002"/>
-          <p:cNvSpPr/>
+      </p:cxnSp>
+      <p:cxnSp>
+        <p:nvCxnSpPr>
+          <p:cNvPr id="4" name="C3-E04 line 2" descr="sci-ppt:o002"/>
+          <p:cNvCxnSpPr/>
           <p:nvPr/>
-        </p:nvSpPr>
-        <p:spPr>
-          <a:xfrm>
-            <a:off x="7909560" y="1280160"/>
-            <a:ext cx="1554480" cy="1554480"/>
-          </a:xfrm>
-          <a:prstGeom prst="ellipse">
+        </p:nvCxnSpPr>
+        <p:spPr>
+          <a:xfrm>
+            <a:off x="6949440" y="1371600"/>
+            <a:ext cx="0" cy="3657600"/>
+          </a:xfrm>
+          <a:prstGeom prst="line">
             <a:avLst/>
           </a:prstGeom>
-          <a:solidFill>
-            <a:srgbClr val="213E4B"/>
-          </a:solidFill>
           <a:ln w="19050">
             <a:solidFill>
               <a:srgbClr val="B4C7D2"/>
@@ -3192,24 +3179,61 @@
           </a:ln>
           <a:effectLst/>
         </p:spPr>
-        <p:txBody>
-          <a:bodyPr rtlCol="0" anchor="ctr"/>
-          <a:lstStyle/>
-          <a:p>
-            <a:pPr algn="ctr"/>
-          </a:p>
-        </p:txBody>
-      </p:sp>
-      <p:sp>
-        <p:nvSpPr>
-          <p:cNvPr id="5" name="C3-E04 text 3" descr="sci-ppt:o003"/>
+      </p:cxnSp>
+      <p:cxnSp>
+        <p:nvCxnSpPr>
+          <p:cNvPr id="5" name="C3-E04 line 3" descr="sci-ppt:o003"/>
+          <p:cNvCxnSpPr/>
+          <p:nvPr/>
+        </p:nvCxnSpPr>
+        <p:spPr>
+          <a:xfrm>
+            <a:off x="7229138" y="5029200"/>
+            <a:ext cx="0" cy="64008"/>
+          </a:xfrm>
+          <a:prstGeom prst="line">
+            <a:avLst/>
+          </a:prstGeom>
+          <a:ln w="12700">
+            <a:solidFill>
+              <a:srgbClr val="B4C7D2"/>
+            </a:solidFill>
+          </a:ln>
+          <a:effectLst/>
+        </p:spPr>
+      </p:cxnSp>
+      <p:cxnSp>
+        <p:nvCxnSpPr>
+          <p:cNvPr id="6" name="C3-E04 line 4" descr="sci-ppt:o004"/>
+          <p:cNvCxnSpPr/>
+          <p:nvPr/>
+        </p:nvCxnSpPr>
+        <p:spPr>
+          <a:xfrm>
+            <a:off x="7229138" y="1371600"/>
+            <a:ext cx="0" cy="3657600"/>
+          </a:xfrm>
+          <a:prstGeom prst="line">
+            <a:avLst/>
+          </a:prstGeom>
+          <a:ln w="7620">
+            <a:solidFill>
+              <a:srgbClr val="2E4756"/>
+            </a:solidFill>
+          </a:ln>
+          <a:effectLst/>
+        </p:spPr>
+      </p:cxnSp>
+      <p:sp>
+        <p:nvSpPr>
+          <p:cNvPr id="7" name="C3-E04 text 5" descr="sci-ppt:o005"/>
           <p:cNvSpPr txBox="1"/>
           <p:nvPr/>
         </p:nvSpPr>
         <p:spPr>
           <a:xfrm>
-            <a:off x="1645920" y="1874519"/>
-            <a:ext cx="1463040" cy="365760"/>
+            <a:off x="6771938" y="5111496"/>
+            <a:ext cx="914400" cy="208407"/>
           </a:xfrm>
           <a:prstGeom prst="rect">
             <a:avLst/>
@@ -3218,7 +3242,843 @@
           <a:effectLst/>
         </p:spPr>
         <p:txBody>
-          <a:bodyPr wrap="square" lIns="27432" rIns="27432" tIns="18288" bIns="18288" anchor="ctr">
+          <a:bodyPr wrap="none" lIns="18288" rIns="18288" tIns="18288" bIns="18288" anchor="t">
+            <a:spAutoFit/>
+          </a:bodyPr>
+          <a:lstStyle/>
+          <a:p>
+            <a:pPr algn="ctr">
+              <a:spcAft>
+                <a:spcPts val="0"/>
+              </a:spcAft>
+            </a:pPr>
+            <a:r>
+              <a:rPr sz="1050" b="0" i="0">
+                <a:solidFill>
+                  <a:srgbClr val="B4C7D2"/>
+                </a:solidFill>
+                <a:latin typeface="Arial"/>
+              </a:rPr>
+              <a:t>20</a:t>
+            </a:r>
+          </a:p>
+        </p:txBody>
+      </p:sp>
+      <p:cxnSp>
+        <p:nvCxnSpPr>
+          <p:cNvPr id="8" name="C3-E04 line 6" descr="sci-ppt:o006"/>
+          <p:cNvCxnSpPr/>
+          <p:nvPr/>
+        </p:nvCxnSpPr>
+        <p:spPr>
+          <a:xfrm>
+            <a:off x="8347934" y="5029200"/>
+            <a:ext cx="0" cy="64008"/>
+          </a:xfrm>
+          <a:prstGeom prst="line">
+            <a:avLst/>
+          </a:prstGeom>
+          <a:ln w="12700">
+            <a:solidFill>
+              <a:srgbClr val="B4C7D2"/>
+            </a:solidFill>
+          </a:ln>
+          <a:effectLst/>
+        </p:spPr>
+      </p:cxnSp>
+      <p:cxnSp>
+        <p:nvCxnSpPr>
+          <p:cNvPr id="9" name="C3-E04 line 7" descr="sci-ppt:o007"/>
+          <p:cNvCxnSpPr/>
+          <p:nvPr/>
+        </p:nvCxnSpPr>
+        <p:spPr>
+          <a:xfrm>
+            <a:off x="8347934" y="1371600"/>
+            <a:ext cx="0" cy="3657600"/>
+          </a:xfrm>
+          <a:prstGeom prst="line">
+            <a:avLst/>
+          </a:prstGeom>
+          <a:ln w="7620">
+            <a:solidFill>
+              <a:srgbClr val="2E4756"/>
+            </a:solidFill>
+          </a:ln>
+          <a:effectLst/>
+        </p:spPr>
+      </p:cxnSp>
+      <p:sp>
+        <p:nvSpPr>
+          <p:cNvPr id="10" name="C3-E04 text 8" descr="sci-ppt:o008"/>
+          <p:cNvSpPr txBox="1"/>
+          <p:nvPr/>
+        </p:nvSpPr>
+        <p:spPr>
+          <a:xfrm>
+            <a:off x="7890734" y="5111496"/>
+            <a:ext cx="914400" cy="208407"/>
+          </a:xfrm>
+          <a:prstGeom prst="rect">
+            <a:avLst/>
+          </a:prstGeom>
+          <a:noFill/>
+          <a:effectLst/>
+        </p:spPr>
+        <p:txBody>
+          <a:bodyPr wrap="none" lIns="18288" rIns="18288" tIns="18288" bIns="18288" anchor="t">
+            <a:spAutoFit/>
+          </a:bodyPr>
+          <a:lstStyle/>
+          <a:p>
+            <a:pPr algn="ctr">
+              <a:spcAft>
+                <a:spcPts val="0"/>
+              </a:spcAft>
+            </a:pPr>
+            <a:r>
+              <a:rPr sz="1050" b="0" i="0">
+                <a:solidFill>
+                  <a:srgbClr val="B4C7D2"/>
+                </a:solidFill>
+                <a:latin typeface="Arial"/>
+              </a:rPr>
+              <a:t>40</a:t>
+            </a:r>
+          </a:p>
+        </p:txBody>
+      </p:sp>
+      <p:cxnSp>
+        <p:nvCxnSpPr>
+          <p:cNvPr id="11" name="C3-E04 line 9" descr="sci-ppt:o009"/>
+          <p:cNvCxnSpPr/>
+          <p:nvPr/>
+        </p:nvCxnSpPr>
+        <p:spPr>
+          <a:xfrm>
+            <a:off x="9466729" y="5029200"/>
+            <a:ext cx="0" cy="64008"/>
+          </a:xfrm>
+          <a:prstGeom prst="line">
+            <a:avLst/>
+          </a:prstGeom>
+          <a:ln w="12700">
+            <a:solidFill>
+              <a:srgbClr val="B4C7D2"/>
+            </a:solidFill>
+          </a:ln>
+          <a:effectLst/>
+        </p:spPr>
+      </p:cxnSp>
+      <p:cxnSp>
+        <p:nvCxnSpPr>
+          <p:cNvPr id="12" name="C3-E04 line 10" descr="sci-ppt:o010"/>
+          <p:cNvCxnSpPr/>
+          <p:nvPr/>
+        </p:nvCxnSpPr>
+        <p:spPr>
+          <a:xfrm>
+            <a:off x="9466729" y="1371600"/>
+            <a:ext cx="0" cy="3657600"/>
+          </a:xfrm>
+          <a:prstGeom prst="line">
+            <a:avLst/>
+          </a:prstGeom>
+          <a:ln w="7620">
+            <a:solidFill>
+              <a:srgbClr val="2E4756"/>
+            </a:solidFill>
+          </a:ln>
+          <a:effectLst/>
+        </p:spPr>
+      </p:cxnSp>
+      <p:sp>
+        <p:nvSpPr>
+          <p:cNvPr id="13" name="C3-E04 text 11" descr="sci-ppt:o011"/>
+          <p:cNvSpPr txBox="1"/>
+          <p:nvPr/>
+        </p:nvSpPr>
+        <p:spPr>
+          <a:xfrm>
+            <a:off x="9009529" y="5111496"/>
+            <a:ext cx="914400" cy="208407"/>
+          </a:xfrm>
+          <a:prstGeom prst="rect">
+            <a:avLst/>
+          </a:prstGeom>
+          <a:noFill/>
+          <a:effectLst/>
+        </p:spPr>
+        <p:txBody>
+          <a:bodyPr wrap="none" lIns="18288" rIns="18288" tIns="18288" bIns="18288" anchor="t">
+            <a:spAutoFit/>
+          </a:bodyPr>
+          <a:lstStyle/>
+          <a:p>
+            <a:pPr algn="ctr">
+              <a:spcAft>
+                <a:spcPts val="0"/>
+              </a:spcAft>
+            </a:pPr>
+            <a:r>
+              <a:rPr sz="1050" b="0" i="0">
+                <a:solidFill>
+                  <a:srgbClr val="B4C7D2"/>
+                </a:solidFill>
+                <a:latin typeface="Arial"/>
+              </a:rPr>
+              <a:t>60</a:t>
+            </a:r>
+          </a:p>
+        </p:txBody>
+      </p:sp>
+      <p:cxnSp>
+        <p:nvCxnSpPr>
+          <p:cNvPr id="14" name="C3-E04 line 12" descr="sci-ppt:o012"/>
+          <p:cNvCxnSpPr/>
+          <p:nvPr/>
+        </p:nvCxnSpPr>
+        <p:spPr>
+          <a:xfrm>
+            <a:off x="10585524" y="5029200"/>
+            <a:ext cx="0" cy="64008"/>
+          </a:xfrm>
+          <a:prstGeom prst="line">
+            <a:avLst/>
+          </a:prstGeom>
+          <a:ln w="12700">
+            <a:solidFill>
+              <a:srgbClr val="B4C7D2"/>
+            </a:solidFill>
+          </a:ln>
+          <a:effectLst/>
+        </p:spPr>
+      </p:cxnSp>
+      <p:cxnSp>
+        <p:nvCxnSpPr>
+          <p:cNvPr id="15" name="C3-E04 line 13" descr="sci-ppt:o013"/>
+          <p:cNvCxnSpPr/>
+          <p:nvPr/>
+        </p:nvCxnSpPr>
+        <p:spPr>
+          <a:xfrm>
+            <a:off x="10585524" y="1371600"/>
+            <a:ext cx="0" cy="3657600"/>
+          </a:xfrm>
+          <a:prstGeom prst="line">
+            <a:avLst/>
+          </a:prstGeom>
+          <a:ln w="7620">
+            <a:solidFill>
+              <a:srgbClr val="2E4756"/>
+            </a:solidFill>
+          </a:ln>
+          <a:effectLst/>
+        </p:spPr>
+      </p:cxnSp>
+      <p:sp>
+        <p:nvSpPr>
+          <p:cNvPr id="16" name="C3-E04 text 14" descr="sci-ppt:o014"/>
+          <p:cNvSpPr txBox="1"/>
+          <p:nvPr/>
+        </p:nvSpPr>
+        <p:spPr>
+          <a:xfrm>
+            <a:off x="10128324" y="5111496"/>
+            <a:ext cx="914400" cy="208407"/>
+          </a:xfrm>
+          <a:prstGeom prst="rect">
+            <a:avLst/>
+          </a:prstGeom>
+          <a:noFill/>
+          <a:effectLst/>
+        </p:spPr>
+        <p:txBody>
+          <a:bodyPr wrap="none" lIns="18288" rIns="18288" tIns="18288" bIns="18288" anchor="t">
+            <a:spAutoFit/>
+          </a:bodyPr>
+          <a:lstStyle/>
+          <a:p>
+            <a:pPr algn="ctr">
+              <a:spcAft>
+                <a:spcPts val="0"/>
+              </a:spcAft>
+            </a:pPr>
+            <a:r>
+              <a:rPr sz="1050" b="0" i="0">
+                <a:solidFill>
+                  <a:srgbClr val="B4C7D2"/>
+                </a:solidFill>
+                <a:latin typeface="Arial"/>
+              </a:rPr>
+              <a:t>80</a:t>
+            </a:r>
+          </a:p>
+        </p:txBody>
+      </p:sp>
+      <p:cxnSp>
+        <p:nvCxnSpPr>
+          <p:cNvPr id="17" name="C3-E04 line 15" descr="sci-ppt:o015"/>
+          <p:cNvCxnSpPr/>
+          <p:nvPr/>
+        </p:nvCxnSpPr>
+        <p:spPr>
+          <a:xfrm>
+            <a:off x="11704320" y="5029200"/>
+            <a:ext cx="0" cy="64008"/>
+          </a:xfrm>
+          <a:prstGeom prst="line">
+            <a:avLst/>
+          </a:prstGeom>
+          <a:ln w="12700">
+            <a:solidFill>
+              <a:srgbClr val="B4C7D2"/>
+            </a:solidFill>
+          </a:ln>
+          <a:effectLst/>
+        </p:spPr>
+      </p:cxnSp>
+      <p:cxnSp>
+        <p:nvCxnSpPr>
+          <p:cNvPr id="18" name="C3-E04 line 16" descr="sci-ppt:o016"/>
+          <p:cNvCxnSpPr/>
+          <p:nvPr/>
+        </p:nvCxnSpPr>
+        <p:spPr>
+          <a:xfrm>
+            <a:off x="11704320" y="1371600"/>
+            <a:ext cx="0" cy="3657600"/>
+          </a:xfrm>
+          <a:prstGeom prst="line">
+            <a:avLst/>
+          </a:prstGeom>
+          <a:ln w="7620">
+            <a:solidFill>
+              <a:srgbClr val="2E4756"/>
+            </a:solidFill>
+          </a:ln>
+          <a:effectLst/>
+        </p:spPr>
+      </p:cxnSp>
+      <p:sp>
+        <p:nvSpPr>
+          <p:cNvPr id="19" name="C3-E04 text 17" descr="sci-ppt:o017"/>
+          <p:cNvSpPr txBox="1"/>
+          <p:nvPr/>
+        </p:nvSpPr>
+        <p:spPr>
+          <a:xfrm>
+            <a:off x="11247120" y="5111496"/>
+            <a:ext cx="914400" cy="208407"/>
+          </a:xfrm>
+          <a:prstGeom prst="rect">
+            <a:avLst/>
+          </a:prstGeom>
+          <a:noFill/>
+          <a:effectLst/>
+        </p:spPr>
+        <p:txBody>
+          <a:bodyPr wrap="none" lIns="18288" rIns="18288" tIns="18288" bIns="18288" anchor="t">
+            <a:spAutoFit/>
+          </a:bodyPr>
+          <a:lstStyle/>
+          <a:p>
+            <a:pPr algn="ctr">
+              <a:spcAft>
+                <a:spcPts val="0"/>
+              </a:spcAft>
+            </a:pPr>
+            <a:r>
+              <a:rPr sz="1050" b="0" i="0">
+                <a:solidFill>
+                  <a:srgbClr val="B4C7D2"/>
+                </a:solidFill>
+                <a:latin typeface="Arial"/>
+              </a:rPr>
+              <a:t>100</a:t>
+            </a:r>
+          </a:p>
+        </p:txBody>
+      </p:sp>
+      <p:cxnSp>
+        <p:nvCxnSpPr>
+          <p:cNvPr id="20" name="C3-E04 line 18" descr="sci-ppt:o018"/>
+          <p:cNvCxnSpPr/>
+          <p:nvPr/>
+        </p:nvCxnSpPr>
+        <p:spPr>
+          <a:xfrm>
+            <a:off x="6885431" y="5029200"/>
+            <a:ext cx="64009" cy="0"/>
+          </a:xfrm>
+          <a:prstGeom prst="line">
+            <a:avLst/>
+          </a:prstGeom>
+          <a:ln w="12700">
+            <a:solidFill>
+              <a:srgbClr val="B4C7D2"/>
+            </a:solidFill>
+          </a:ln>
+          <a:effectLst/>
+        </p:spPr>
+      </p:cxnSp>
+      <p:cxnSp>
+        <p:nvCxnSpPr>
+          <p:cNvPr id="21" name="C3-E04 line 19" descr="sci-ppt:o019"/>
+          <p:cNvCxnSpPr/>
+          <p:nvPr/>
+        </p:nvCxnSpPr>
+        <p:spPr>
+          <a:xfrm>
+            <a:off x="6949440" y="5029200"/>
+            <a:ext cx="4754880" cy="0"/>
+          </a:xfrm>
+          <a:prstGeom prst="line">
+            <a:avLst/>
+          </a:prstGeom>
+          <a:ln w="7620">
+            <a:solidFill>
+              <a:srgbClr val="2E4756"/>
+            </a:solidFill>
+          </a:ln>
+          <a:effectLst/>
+        </p:spPr>
+      </p:cxnSp>
+      <p:sp>
+        <p:nvSpPr>
+          <p:cNvPr id="22" name="C3-E04 text 20" descr="sci-ppt:o020"/>
+          <p:cNvSpPr txBox="1"/>
+          <p:nvPr/>
+        </p:nvSpPr>
+        <p:spPr>
+          <a:xfrm>
+            <a:off x="6080759" y="4946904"/>
+            <a:ext cx="777240" cy="208407"/>
+          </a:xfrm>
+          <a:prstGeom prst="rect">
+            <a:avLst/>
+          </a:prstGeom>
+          <a:noFill/>
+          <a:effectLst/>
+        </p:spPr>
+        <p:txBody>
+          <a:bodyPr wrap="none" lIns="18288" rIns="18288" tIns="18288" bIns="18288" anchor="t">
+            <a:spAutoFit/>
+          </a:bodyPr>
+          <a:lstStyle/>
+          <a:p>
+            <a:pPr algn="r">
+              <a:spcAft>
+                <a:spcPts val="0"/>
+              </a:spcAft>
+            </a:pPr>
+            <a:r>
+              <a:rPr sz="1050" b="0" i="0">
+                <a:solidFill>
+                  <a:srgbClr val="B4C7D2"/>
+                </a:solidFill>
+                <a:latin typeface="Arial"/>
+              </a:rPr>
+              <a:t>0.00</a:t>
+            </a:r>
+          </a:p>
+        </p:txBody>
+      </p:sp>
+      <p:cxnSp>
+        <p:nvCxnSpPr>
+          <p:cNvPr id="23" name="C3-E04 line 21" descr="sci-ppt:o021"/>
+          <p:cNvCxnSpPr/>
+          <p:nvPr/>
+        </p:nvCxnSpPr>
+        <p:spPr>
+          <a:xfrm>
+            <a:off x="6885431" y="4216400"/>
+            <a:ext cx="64009" cy="0"/>
+          </a:xfrm>
+          <a:prstGeom prst="line">
+            <a:avLst/>
+          </a:prstGeom>
+          <a:ln w="12700">
+            <a:solidFill>
+              <a:srgbClr val="B4C7D2"/>
+            </a:solidFill>
+          </a:ln>
+          <a:effectLst/>
+        </p:spPr>
+      </p:cxnSp>
+      <p:cxnSp>
+        <p:nvCxnSpPr>
+          <p:cNvPr id="24" name="C3-E04 line 22" descr="sci-ppt:o022"/>
+          <p:cNvCxnSpPr/>
+          <p:nvPr/>
+        </p:nvCxnSpPr>
+        <p:spPr>
+          <a:xfrm>
+            <a:off x="6949440" y="4216400"/>
+            <a:ext cx="4754880" cy="0"/>
+          </a:xfrm>
+          <a:prstGeom prst="line">
+            <a:avLst/>
+          </a:prstGeom>
+          <a:ln w="7620">
+            <a:solidFill>
+              <a:srgbClr val="2E4756"/>
+            </a:solidFill>
+          </a:ln>
+          <a:effectLst/>
+        </p:spPr>
+      </p:cxnSp>
+      <p:sp>
+        <p:nvSpPr>
+          <p:cNvPr id="25" name="C3-E04 text 23" descr="sci-ppt:o023"/>
+          <p:cNvSpPr txBox="1"/>
+          <p:nvPr/>
+        </p:nvSpPr>
+        <p:spPr>
+          <a:xfrm>
+            <a:off x="6080759" y="4134104"/>
+            <a:ext cx="777240" cy="208407"/>
+          </a:xfrm>
+          <a:prstGeom prst="rect">
+            <a:avLst/>
+          </a:prstGeom>
+          <a:noFill/>
+          <a:effectLst/>
+        </p:spPr>
+        <p:txBody>
+          <a:bodyPr wrap="none" lIns="18288" rIns="18288" tIns="18288" bIns="18288" anchor="t">
+            <a:spAutoFit/>
+          </a:bodyPr>
+          <a:lstStyle/>
+          <a:p>
+            <a:pPr algn="r">
+              <a:spcAft>
+                <a:spcPts val="0"/>
+              </a:spcAft>
+            </a:pPr>
+            <a:r>
+              <a:rPr sz="1050" b="0" i="0">
+                <a:solidFill>
+                  <a:srgbClr val="B4C7D2"/>
+                </a:solidFill>
+                <a:latin typeface="Arial"/>
+              </a:rPr>
+              <a:t>0.07</a:t>
+            </a:r>
+          </a:p>
+        </p:txBody>
+      </p:sp>
+      <p:cxnSp>
+        <p:nvCxnSpPr>
+          <p:cNvPr id="26" name="C3-E04 line 24" descr="sci-ppt:o024"/>
+          <p:cNvCxnSpPr/>
+          <p:nvPr/>
+        </p:nvCxnSpPr>
+        <p:spPr>
+          <a:xfrm>
+            <a:off x="6885431" y="3287485"/>
+            <a:ext cx="64009" cy="0"/>
+          </a:xfrm>
+          <a:prstGeom prst="line">
+            <a:avLst/>
+          </a:prstGeom>
+          <a:ln w="12700">
+            <a:solidFill>
+              <a:srgbClr val="B4C7D2"/>
+            </a:solidFill>
+          </a:ln>
+          <a:effectLst/>
+        </p:spPr>
+      </p:cxnSp>
+      <p:cxnSp>
+        <p:nvCxnSpPr>
+          <p:cNvPr id="27" name="C3-E04 line 25" descr="sci-ppt:o025"/>
+          <p:cNvCxnSpPr/>
+          <p:nvPr/>
+        </p:nvCxnSpPr>
+        <p:spPr>
+          <a:xfrm>
+            <a:off x="6949440" y="3287485"/>
+            <a:ext cx="4754880" cy="0"/>
+          </a:xfrm>
+          <a:prstGeom prst="line">
+            <a:avLst/>
+          </a:prstGeom>
+          <a:ln w="7620">
+            <a:solidFill>
+              <a:srgbClr val="2E4756"/>
+            </a:solidFill>
+          </a:ln>
+          <a:effectLst/>
+        </p:spPr>
+      </p:cxnSp>
+      <p:sp>
+        <p:nvSpPr>
+          <p:cNvPr id="28" name="C3-E04 text 26" descr="sci-ppt:o026"/>
+          <p:cNvSpPr txBox="1"/>
+          <p:nvPr/>
+        </p:nvSpPr>
+        <p:spPr>
+          <a:xfrm>
+            <a:off x="6080759" y="3205189"/>
+            <a:ext cx="777240" cy="208407"/>
+          </a:xfrm>
+          <a:prstGeom prst="rect">
+            <a:avLst/>
+          </a:prstGeom>
+          <a:noFill/>
+          <a:effectLst/>
+        </p:spPr>
+        <p:txBody>
+          <a:bodyPr wrap="none" lIns="18288" rIns="18288" tIns="18288" bIns="18288" anchor="t">
+            <a:spAutoFit/>
+          </a:bodyPr>
+          <a:lstStyle/>
+          <a:p>
+            <a:pPr algn="r">
+              <a:spcAft>
+                <a:spcPts val="0"/>
+              </a:spcAft>
+            </a:pPr>
+            <a:r>
+              <a:rPr sz="1050" b="0" i="0">
+                <a:solidFill>
+                  <a:srgbClr val="B4C7D2"/>
+                </a:solidFill>
+                <a:latin typeface="Arial"/>
+              </a:rPr>
+              <a:t>0.15</a:t>
+            </a:r>
+          </a:p>
+        </p:txBody>
+      </p:sp>
+      <p:cxnSp>
+        <p:nvCxnSpPr>
+          <p:cNvPr id="29" name="C3-E04 line 27" descr="sci-ppt:o027"/>
+          <p:cNvCxnSpPr/>
+          <p:nvPr/>
+        </p:nvCxnSpPr>
+        <p:spPr>
+          <a:xfrm>
+            <a:off x="6885431" y="2474685"/>
+            <a:ext cx="64009" cy="0"/>
+          </a:xfrm>
+          <a:prstGeom prst="line">
+            <a:avLst/>
+          </a:prstGeom>
+          <a:ln w="12700">
+            <a:solidFill>
+              <a:srgbClr val="B4C7D2"/>
+            </a:solidFill>
+          </a:ln>
+          <a:effectLst/>
+        </p:spPr>
+      </p:cxnSp>
+      <p:cxnSp>
+        <p:nvCxnSpPr>
+          <p:cNvPr id="30" name="C3-E04 line 28" descr="sci-ppt:o028"/>
+          <p:cNvCxnSpPr/>
+          <p:nvPr/>
+        </p:nvCxnSpPr>
+        <p:spPr>
+          <a:xfrm>
+            <a:off x="6949440" y="2474685"/>
+            <a:ext cx="4754880" cy="0"/>
+          </a:xfrm>
+          <a:prstGeom prst="line">
+            <a:avLst/>
+          </a:prstGeom>
+          <a:ln w="7620">
+            <a:solidFill>
+              <a:srgbClr val="2E4756"/>
+            </a:solidFill>
+          </a:ln>
+          <a:effectLst/>
+        </p:spPr>
+      </p:cxnSp>
+      <p:sp>
+        <p:nvSpPr>
+          <p:cNvPr id="31" name="C3-E04 text 29" descr="sci-ppt:o029"/>
+          <p:cNvSpPr txBox="1"/>
+          <p:nvPr/>
+        </p:nvSpPr>
+        <p:spPr>
+          <a:xfrm>
+            <a:off x="6080759" y="2392389"/>
+            <a:ext cx="777240" cy="208407"/>
+          </a:xfrm>
+          <a:prstGeom prst="rect">
+            <a:avLst/>
+          </a:prstGeom>
+          <a:noFill/>
+          <a:effectLst/>
+        </p:spPr>
+        <p:txBody>
+          <a:bodyPr wrap="none" lIns="18288" rIns="18288" tIns="18288" bIns="18288" anchor="t">
+            <a:spAutoFit/>
+          </a:bodyPr>
+          <a:lstStyle/>
+          <a:p>
+            <a:pPr algn="r">
+              <a:spcAft>
+                <a:spcPts val="0"/>
+              </a:spcAft>
+            </a:pPr>
+            <a:r>
+              <a:rPr sz="1050" b="0" i="0">
+                <a:solidFill>
+                  <a:srgbClr val="B4C7D2"/>
+                </a:solidFill>
+                <a:latin typeface="Arial"/>
+              </a:rPr>
+              <a:t>0.22</a:t>
+            </a:r>
+          </a:p>
+        </p:txBody>
+      </p:sp>
+      <p:cxnSp>
+        <p:nvCxnSpPr>
+          <p:cNvPr id="32" name="C3-E04 line 30" descr="sci-ppt:o030"/>
+          <p:cNvCxnSpPr/>
+          <p:nvPr/>
+        </p:nvCxnSpPr>
+        <p:spPr>
+          <a:xfrm>
+            <a:off x="6885431" y="1545771"/>
+            <a:ext cx="64009" cy="0"/>
+          </a:xfrm>
+          <a:prstGeom prst="line">
+            <a:avLst/>
+          </a:prstGeom>
+          <a:ln w="12700">
+            <a:solidFill>
+              <a:srgbClr val="B4C7D2"/>
+            </a:solidFill>
+          </a:ln>
+          <a:effectLst/>
+        </p:spPr>
+      </p:cxnSp>
+      <p:cxnSp>
+        <p:nvCxnSpPr>
+          <p:cNvPr id="33" name="C3-E04 line 31" descr="sci-ppt:o031"/>
+          <p:cNvCxnSpPr/>
+          <p:nvPr/>
+        </p:nvCxnSpPr>
+        <p:spPr>
+          <a:xfrm>
+            <a:off x="6949440" y="1545771"/>
+            <a:ext cx="4754880" cy="0"/>
+          </a:xfrm>
+          <a:prstGeom prst="line">
+            <a:avLst/>
+          </a:prstGeom>
+          <a:ln w="7620">
+            <a:solidFill>
+              <a:srgbClr val="2E4756"/>
+            </a:solidFill>
+          </a:ln>
+          <a:effectLst/>
+        </p:spPr>
+      </p:cxnSp>
+      <p:sp>
+        <p:nvSpPr>
+          <p:cNvPr id="34" name="C3-E04 text 32" descr="sci-ppt:o032"/>
+          <p:cNvSpPr txBox="1"/>
+          <p:nvPr/>
+        </p:nvSpPr>
+        <p:spPr>
+          <a:xfrm>
+            <a:off x="6080759" y="1463475"/>
+            <a:ext cx="777240" cy="208407"/>
+          </a:xfrm>
+          <a:prstGeom prst="rect">
+            <a:avLst/>
+          </a:prstGeom>
+          <a:noFill/>
+          <a:effectLst/>
+        </p:spPr>
+        <p:txBody>
+          <a:bodyPr wrap="none" lIns="18288" rIns="18288" tIns="18288" bIns="18288" anchor="t">
+            <a:spAutoFit/>
+          </a:bodyPr>
+          <a:lstStyle/>
+          <a:p>
+            <a:pPr algn="r">
+              <a:spcAft>
+                <a:spcPts val="0"/>
+              </a:spcAft>
+            </a:pPr>
+            <a:r>
+              <a:rPr sz="1050" b="0" i="0">
+                <a:solidFill>
+                  <a:srgbClr val="B4C7D2"/>
+                </a:solidFill>
+                <a:latin typeface="Arial"/>
+              </a:rPr>
+              <a:t>0.30</a:t>
+            </a:r>
+          </a:p>
+        </p:txBody>
+      </p:sp>
+      <p:sp>
+        <p:nvSpPr>
+          <p:cNvPr id="35" name="C3-E04 text 33" descr="sci-ppt:o033"/>
+          <p:cNvSpPr txBox="1"/>
+          <p:nvPr/>
+        </p:nvSpPr>
+        <p:spPr>
+          <a:xfrm>
+            <a:off x="6949440" y="5312664"/>
+            <a:ext cx="4754880" cy="231648"/>
+          </a:xfrm>
+          <a:prstGeom prst="rect">
+            <a:avLst/>
+          </a:prstGeom>
+          <a:noFill/>
+          <a:effectLst/>
+        </p:spPr>
+        <p:txBody>
+          <a:bodyPr wrap="none" lIns="18288" rIns="18288" tIns="18288" bIns="18288" anchor="t">
+            <a:spAutoFit/>
+          </a:bodyPr>
+          <a:lstStyle/>
+          <a:p>
+            <a:pPr algn="ctr">
+              <a:spcAft>
+                <a:spcPts val="0"/>
+              </a:spcAft>
+            </a:pPr>
+            <a:r>
+              <a:rPr sz="1200" b="0" i="0">
+                <a:solidFill>
+                  <a:srgbClr val="E7F0F3"/>
+                </a:solidFill>
+                <a:latin typeface="Arial"/>
+              </a:rPr>
+              <a:t>distance dᵢⱼ  (µm)</a:t>
+            </a:r>
+          </a:p>
+        </p:txBody>
+      </p:sp>
+      <p:sp>
+        <p:nvSpPr>
+          <p:cNvPr id="36" name="C3-E04 text 34" descr="sci-ppt:o034"/>
+          <p:cNvSpPr txBox="1"/>
+          <p:nvPr/>
+        </p:nvSpPr>
+        <p:spPr>
+          <a:xfrm>
+            <a:off x="6400800" y="1024128"/>
+            <a:ext cx="4754880" cy="231648"/>
+          </a:xfrm>
+          <a:prstGeom prst="rect">
+            <a:avLst/>
+          </a:prstGeom>
+          <a:noFill/>
+          <a:effectLst/>
+        </p:spPr>
+        <p:txBody>
+          <a:bodyPr wrap="none" lIns="18288" rIns="18288" tIns="18288" bIns="18288" anchor="t">
             <a:spAutoFit/>
           </a:bodyPr>
           <a:lstStyle/>
@@ -3229,27 +4089,665 @@
               </a:spcAft>
             </a:pPr>
             <a:r>
-              <a:rPr sz="1700" b="0" i="0">
+              <a:rPr sz="1200" b="0" i="0">
                 <a:solidFill>
                   <a:srgbClr val="E7F0F3"/>
                 </a:solidFill>
                 <a:latin typeface="Arial"/>
               </a:rPr>
-              <a:t>j: source</a:t>
-            </a:r>
-          </a:p>
-        </p:txBody>
-      </p:sp>
-      <p:sp>
-        <p:nvSpPr>
-          <p:cNvPr id="6" name="C3-E04 text 4" descr="sci-ppt:o004"/>
+              <a:t>p′ (MPa)</a:t>
+            </a:r>
+          </a:p>
+        </p:txBody>
+      </p:sp>
+      <p:sp>
+        <p:nvSpPr>
+          <p:cNvPr id="37" name="C3-E04 polygon 35" descr="sci-ppt:o035"/>
+          <p:cNvSpPr/>
+          <p:nvPr/>
+        </p:nvSpPr>
+        <p:spPr>
+          <a:xfrm>
+            <a:off x="6949440" y="1666021"/>
+            <a:ext cx="4754880" cy="2858702"/>
+          </a:xfrm>
+          <a:custGeom>
+            <a:avLst/>
+            <a:gdLst/>
+            <a:ahLst/>
+            <a:cxnLst/>
+            <a:rect l="l" t="t" r="r" b="b"/>
+            <a:pathLst>
+              <a:path w="4754880" h="2858702">
+                <a:moveTo>
+                  <a:pt x="0" y="0"/>
+                </a:moveTo>
+                <a:lnTo>
+                  <a:pt x="23893" y="93117"/>
+                </a:lnTo>
+                <a:lnTo>
+                  <a:pt x="47787" y="181217"/>
+                </a:lnTo>
+                <a:lnTo>
+                  <a:pt x="71681" y="264695"/>
+                </a:lnTo>
+                <a:lnTo>
+                  <a:pt x="95575" y="343904"/>
+                </a:lnTo>
+                <a:lnTo>
+                  <a:pt x="119469" y="419164"/>
+                </a:lnTo>
+                <a:lnTo>
+                  <a:pt x="143363" y="490764"/>
+                </a:lnTo>
+                <a:lnTo>
+                  <a:pt x="167257" y="558964"/>
+                </a:lnTo>
+                <a:lnTo>
+                  <a:pt x="191150" y="624000"/>
+                </a:lnTo>
+                <a:lnTo>
+                  <a:pt x="215044" y="686088"/>
+                </a:lnTo>
+                <a:lnTo>
+                  <a:pt x="238938" y="745424"/>
+                </a:lnTo>
+                <a:lnTo>
+                  <a:pt x="262832" y="802187"/>
+                </a:lnTo>
+                <a:lnTo>
+                  <a:pt x="286726" y="856540"/>
+                </a:lnTo>
+                <a:lnTo>
+                  <a:pt x="310620" y="908634"/>
+                </a:lnTo>
+                <a:lnTo>
+                  <a:pt x="334514" y="958606"/>
+                </a:lnTo>
+                <a:lnTo>
+                  <a:pt x="358408" y="1006585"/>
+                </a:lnTo>
+                <a:lnTo>
+                  <a:pt x="382301" y="1052686"/>
+                </a:lnTo>
+                <a:lnTo>
+                  <a:pt x="406195" y="1097019"/>
+                </a:lnTo>
+                <a:lnTo>
+                  <a:pt x="430089" y="1139682"/>
+                </a:lnTo>
+                <a:lnTo>
+                  <a:pt x="453983" y="1180768"/>
+                </a:lnTo>
+                <a:lnTo>
+                  <a:pt x="477877" y="1220364"/>
+                </a:lnTo>
+                <a:lnTo>
+                  <a:pt x="501771" y="1258548"/>
+                </a:lnTo>
+                <a:lnTo>
+                  <a:pt x="525665" y="1295395"/>
+                </a:lnTo>
+                <a:lnTo>
+                  <a:pt x="549558" y="1330974"/>
+                </a:lnTo>
+                <a:lnTo>
+                  <a:pt x="573452" y="1365350"/>
+                </a:lnTo>
+                <a:lnTo>
+                  <a:pt x="597346" y="1398582"/>
+                </a:lnTo>
+                <a:lnTo>
+                  <a:pt x="621240" y="1430727"/>
+                </a:lnTo>
+                <a:lnTo>
+                  <a:pt x="645134" y="1461836"/>
+                </a:lnTo>
+                <a:lnTo>
+                  <a:pt x="669028" y="1491960"/>
+                </a:lnTo>
+                <a:lnTo>
+                  <a:pt x="692922" y="1521144"/>
+                </a:lnTo>
+                <a:lnTo>
+                  <a:pt x="716816" y="1549432"/>
+                </a:lnTo>
+                <a:lnTo>
+                  <a:pt x="740709" y="1576864"/>
+                </a:lnTo>
+                <a:lnTo>
+                  <a:pt x="764603" y="1603479"/>
+                </a:lnTo>
+                <a:lnTo>
+                  <a:pt x="788497" y="1629312"/>
+                </a:lnTo>
+                <a:lnTo>
+                  <a:pt x="812391" y="1654398"/>
+                </a:lnTo>
+                <a:lnTo>
+                  <a:pt x="836285" y="1678768"/>
+                </a:lnTo>
+                <a:lnTo>
+                  <a:pt x="860179" y="1702453"/>
+                </a:lnTo>
+                <a:lnTo>
+                  <a:pt x="884073" y="1725481"/>
+                </a:lnTo>
+                <a:lnTo>
+                  <a:pt x="907967" y="1747879"/>
+                </a:lnTo>
+                <a:lnTo>
+                  <a:pt x="931860" y="1769672"/>
+                </a:lnTo>
+                <a:lnTo>
+                  <a:pt x="955754" y="1790886"/>
+                </a:lnTo>
+                <a:lnTo>
+                  <a:pt x="979648" y="1811542"/>
+                </a:lnTo>
+                <a:lnTo>
+                  <a:pt x="1003542" y="1831662"/>
+                </a:lnTo>
+                <a:lnTo>
+                  <a:pt x="1027436" y="1851268"/>
+                </a:lnTo>
+                <a:lnTo>
+                  <a:pt x="1051330" y="1870377"/>
+                </a:lnTo>
+                <a:lnTo>
+                  <a:pt x="1075224" y="1889010"/>
+                </a:lnTo>
+                <a:lnTo>
+                  <a:pt x="1099117" y="1907183"/>
+                </a:lnTo>
+                <a:lnTo>
+                  <a:pt x="1123011" y="1924914"/>
+                </a:lnTo>
+                <a:lnTo>
+                  <a:pt x="1146905" y="1942218"/>
+                </a:lnTo>
+                <a:lnTo>
+                  <a:pt x="1170799" y="1959110"/>
+                </a:lnTo>
+                <a:lnTo>
+                  <a:pt x="1194693" y="1975606"/>
+                </a:lnTo>
+                <a:lnTo>
+                  <a:pt x="1218587" y="1991718"/>
+                </a:lnTo>
+                <a:lnTo>
+                  <a:pt x="1242481" y="2007461"/>
+                </a:lnTo>
+                <a:lnTo>
+                  <a:pt x="1266375" y="2022846"/>
+                </a:lnTo>
+                <a:lnTo>
+                  <a:pt x="1290268" y="2037886"/>
+                </a:lnTo>
+                <a:lnTo>
+                  <a:pt x="1314162" y="2052593"/>
+                </a:lnTo>
+                <a:lnTo>
+                  <a:pt x="1338056" y="2066976"/>
+                </a:lnTo>
+                <a:lnTo>
+                  <a:pt x="1361950" y="2081047"/>
+                </a:lnTo>
+                <a:lnTo>
+                  <a:pt x="1385844" y="2094816"/>
+                </a:lnTo>
+                <a:lnTo>
+                  <a:pt x="1409738" y="2108292"/>
+                </a:lnTo>
+                <a:lnTo>
+                  <a:pt x="1433632" y="2121485"/>
+                </a:lnTo>
+                <a:lnTo>
+                  <a:pt x="1457526" y="2134404"/>
+                </a:lnTo>
+                <a:lnTo>
+                  <a:pt x="1481419" y="2147056"/>
+                </a:lnTo>
+                <a:lnTo>
+                  <a:pt x="1505313" y="2159451"/>
+                </a:lnTo>
+                <a:lnTo>
+                  <a:pt x="1529207" y="2171595"/>
+                </a:lnTo>
+                <a:lnTo>
+                  <a:pt x="1553101" y="2183497"/>
+                </a:lnTo>
+                <a:lnTo>
+                  <a:pt x="1576995" y="2195164"/>
+                </a:lnTo>
+                <a:lnTo>
+                  <a:pt x="1600889" y="2206602"/>
+                </a:lnTo>
+                <a:lnTo>
+                  <a:pt x="1624783" y="2217818"/>
+                </a:lnTo>
+                <a:lnTo>
+                  <a:pt x="1648676" y="2228818"/>
+                </a:lnTo>
+                <a:lnTo>
+                  <a:pt x="1672570" y="2239610"/>
+                </a:lnTo>
+                <a:lnTo>
+                  <a:pt x="1696464" y="2250198"/>
+                </a:lnTo>
+                <a:lnTo>
+                  <a:pt x="1720358" y="2260588"/>
+                </a:lnTo>
+                <a:lnTo>
+                  <a:pt x="1744252" y="2270786"/>
+                </a:lnTo>
+                <a:lnTo>
+                  <a:pt x="1768146" y="2280797"/>
+                </a:lnTo>
+                <a:lnTo>
+                  <a:pt x="1792040" y="2290626"/>
+                </a:lnTo>
+                <a:lnTo>
+                  <a:pt x="1815934" y="2300279"/>
+                </a:lnTo>
+                <a:lnTo>
+                  <a:pt x="1839827" y="2309759"/>
+                </a:lnTo>
+                <a:lnTo>
+                  <a:pt x="1863721" y="2319072"/>
+                </a:lnTo>
+                <a:lnTo>
+                  <a:pt x="1887615" y="2328221"/>
+                </a:lnTo>
+                <a:lnTo>
+                  <a:pt x="1911509" y="2337211"/>
+                </a:lnTo>
+                <a:lnTo>
+                  <a:pt x="1935403" y="2346047"/>
+                </a:lnTo>
+                <a:lnTo>
+                  <a:pt x="1959297" y="2354732"/>
+                </a:lnTo>
+                <a:lnTo>
+                  <a:pt x="1983191" y="2363269"/>
+                </a:lnTo>
+                <a:lnTo>
+                  <a:pt x="2007085" y="2371664"/>
+                </a:lnTo>
+                <a:lnTo>
+                  <a:pt x="2030978" y="2379918"/>
+                </a:lnTo>
+                <a:lnTo>
+                  <a:pt x="2054872" y="2388036"/>
+                </a:lnTo>
+                <a:lnTo>
+                  <a:pt x="2078766" y="2396022"/>
+                </a:lnTo>
+                <a:lnTo>
+                  <a:pt x="2102660" y="2403877"/>
+                </a:lnTo>
+                <a:lnTo>
+                  <a:pt x="2126554" y="2411606"/>
+                </a:lnTo>
+                <a:lnTo>
+                  <a:pt x="2150448" y="2419212"/>
+                </a:lnTo>
+                <a:lnTo>
+                  <a:pt x="2174342" y="2426696"/>
+                </a:lnTo>
+                <a:lnTo>
+                  <a:pt x="2198235" y="2434063"/>
+                </a:lnTo>
+                <a:lnTo>
+                  <a:pt x="2222129" y="2441315"/>
+                </a:lnTo>
+                <a:lnTo>
+                  <a:pt x="2246023" y="2448455"/>
+                </a:lnTo>
+                <a:lnTo>
+                  <a:pt x="2269917" y="2455485"/>
+                </a:lnTo>
+                <a:lnTo>
+                  <a:pt x="2293811" y="2462408"/>
+                </a:lnTo>
+                <a:lnTo>
+                  <a:pt x="2317705" y="2469226"/>
+                </a:lnTo>
+                <a:lnTo>
+                  <a:pt x="2341599" y="2475941"/>
+                </a:lnTo>
+                <a:lnTo>
+                  <a:pt x="2365493" y="2482557"/>
+                </a:lnTo>
+                <a:lnTo>
+                  <a:pt x="2389386" y="2489074"/>
+                </a:lnTo>
+                <a:lnTo>
+                  <a:pt x="2413280" y="2495496"/>
+                </a:lnTo>
+                <a:lnTo>
+                  <a:pt x="2437174" y="2501824"/>
+                </a:lnTo>
+                <a:lnTo>
+                  <a:pt x="2461068" y="2508060"/>
+                </a:lnTo>
+                <a:lnTo>
+                  <a:pt x="2484962" y="2514207"/>
+                </a:lnTo>
+                <a:lnTo>
+                  <a:pt x="2508856" y="2520266"/>
+                </a:lnTo>
+                <a:lnTo>
+                  <a:pt x="2532750" y="2526239"/>
+                </a:lnTo>
+                <a:lnTo>
+                  <a:pt x="2556644" y="2532128"/>
+                </a:lnTo>
+                <a:lnTo>
+                  <a:pt x="2580537" y="2537935"/>
+                </a:lnTo>
+                <a:lnTo>
+                  <a:pt x="2604431" y="2543661"/>
+                </a:lnTo>
+                <a:lnTo>
+                  <a:pt x="2628325" y="2549308"/>
+                </a:lnTo>
+                <a:lnTo>
+                  <a:pt x="2652219" y="2554878"/>
+                </a:lnTo>
+                <a:lnTo>
+                  <a:pt x="2676113" y="2560373"/>
+                </a:lnTo>
+                <a:lnTo>
+                  <a:pt x="2700007" y="2565793"/>
+                </a:lnTo>
+                <a:lnTo>
+                  <a:pt x="2723901" y="2571140"/>
+                </a:lnTo>
+                <a:lnTo>
+                  <a:pt x="2747794" y="2576416"/>
+                </a:lnTo>
+                <a:lnTo>
+                  <a:pt x="2771688" y="2581622"/>
+                </a:lnTo>
+                <a:lnTo>
+                  <a:pt x="2795582" y="2586760"/>
+                </a:lnTo>
+                <a:lnTo>
+                  <a:pt x="2819476" y="2591831"/>
+                </a:lnTo>
+                <a:lnTo>
+                  <a:pt x="2843370" y="2596836"/>
+                </a:lnTo>
+                <a:lnTo>
+                  <a:pt x="2867264" y="2601776"/>
+                </a:lnTo>
+                <a:lnTo>
+                  <a:pt x="2891158" y="2606653"/>
+                </a:lnTo>
+                <a:lnTo>
+                  <a:pt x="2915052" y="2611468"/>
+                </a:lnTo>
+                <a:lnTo>
+                  <a:pt x="2938945" y="2616223"/>
+                </a:lnTo>
+                <a:lnTo>
+                  <a:pt x="2962839" y="2620917"/>
+                </a:lnTo>
+                <a:lnTo>
+                  <a:pt x="2986733" y="2625553"/>
+                </a:lnTo>
+                <a:lnTo>
+                  <a:pt x="3010627" y="2630131"/>
+                </a:lnTo>
+                <a:lnTo>
+                  <a:pt x="3034521" y="2634653"/>
+                </a:lnTo>
+                <a:lnTo>
+                  <a:pt x="3058415" y="2639119"/>
+                </a:lnTo>
+                <a:lnTo>
+                  <a:pt x="3082309" y="2643531"/>
+                </a:lnTo>
+                <a:lnTo>
+                  <a:pt x="3106203" y="2647889"/>
+                </a:lnTo>
+                <a:lnTo>
+                  <a:pt x="3130096" y="2652195"/>
+                </a:lnTo>
+                <a:lnTo>
+                  <a:pt x="3153990" y="2656449"/>
+                </a:lnTo>
+                <a:lnTo>
+                  <a:pt x="3177884" y="2660653"/>
+                </a:lnTo>
+                <a:lnTo>
+                  <a:pt x="3201778" y="2664807"/>
+                </a:lnTo>
+                <a:lnTo>
+                  <a:pt x="3225672" y="2668912"/>
+                </a:lnTo>
+                <a:lnTo>
+                  <a:pt x="3249566" y="2672970"/>
+                </a:lnTo>
+                <a:lnTo>
+                  <a:pt x="3273460" y="2676980"/>
+                </a:lnTo>
+                <a:lnTo>
+                  <a:pt x="3297353" y="2680943"/>
+                </a:lnTo>
+                <a:lnTo>
+                  <a:pt x="3321247" y="2684862"/>
+                </a:lnTo>
+                <a:lnTo>
+                  <a:pt x="3345141" y="2688735"/>
+                </a:lnTo>
+                <a:lnTo>
+                  <a:pt x="3369035" y="2692565"/>
+                </a:lnTo>
+                <a:lnTo>
+                  <a:pt x="3392929" y="2696351"/>
+                </a:lnTo>
+                <a:lnTo>
+                  <a:pt x="3416823" y="2700095"/>
+                </a:lnTo>
+                <a:lnTo>
+                  <a:pt x="3440717" y="2703797"/>
+                </a:lnTo>
+                <a:lnTo>
+                  <a:pt x="3464611" y="2707458"/>
+                </a:lnTo>
+                <a:lnTo>
+                  <a:pt x="3488504" y="2711078"/>
+                </a:lnTo>
+                <a:lnTo>
+                  <a:pt x="3512398" y="2714659"/>
+                </a:lnTo>
+                <a:lnTo>
+                  <a:pt x="3536292" y="2718200"/>
+                </a:lnTo>
+                <a:lnTo>
+                  <a:pt x="3560186" y="2721703"/>
+                </a:lnTo>
+                <a:lnTo>
+                  <a:pt x="3584080" y="2725168"/>
+                </a:lnTo>
+                <a:lnTo>
+                  <a:pt x="3607974" y="2728596"/>
+                </a:lnTo>
+                <a:lnTo>
+                  <a:pt x="3631868" y="2731988"/>
+                </a:lnTo>
+                <a:lnTo>
+                  <a:pt x="3655762" y="2735343"/>
+                </a:lnTo>
+                <a:lnTo>
+                  <a:pt x="3679655" y="2738663"/>
+                </a:lnTo>
+                <a:lnTo>
+                  <a:pt x="3703549" y="2741948"/>
+                </a:lnTo>
+                <a:lnTo>
+                  <a:pt x="3727443" y="2745198"/>
+                </a:lnTo>
+                <a:lnTo>
+                  <a:pt x="3751337" y="2748415"/>
+                </a:lnTo>
+                <a:lnTo>
+                  <a:pt x="3775231" y="2751598"/>
+                </a:lnTo>
+                <a:lnTo>
+                  <a:pt x="3799125" y="2754749"/>
+                </a:lnTo>
+                <a:lnTo>
+                  <a:pt x="3823019" y="2757867"/>
+                </a:lnTo>
+                <a:lnTo>
+                  <a:pt x="3846912" y="2760954"/>
+                </a:lnTo>
+                <a:lnTo>
+                  <a:pt x="3870806" y="2764009"/>
+                </a:lnTo>
+                <a:lnTo>
+                  <a:pt x="3894700" y="2767033"/>
+                </a:lnTo>
+                <a:lnTo>
+                  <a:pt x="3918594" y="2770027"/>
+                </a:lnTo>
+                <a:lnTo>
+                  <a:pt x="3942488" y="2772991"/>
+                </a:lnTo>
+                <a:lnTo>
+                  <a:pt x="3966382" y="2775926"/>
+                </a:lnTo>
+                <a:lnTo>
+                  <a:pt x="3990276" y="2778831"/>
+                </a:lnTo>
+                <a:lnTo>
+                  <a:pt x="4014170" y="2781708"/>
+                </a:lnTo>
+                <a:lnTo>
+                  <a:pt x="4038063" y="2784557"/>
+                </a:lnTo>
+                <a:lnTo>
+                  <a:pt x="4061957" y="2787378"/>
+                </a:lnTo>
+                <a:lnTo>
+                  <a:pt x="4085851" y="2790171"/>
+                </a:lnTo>
+                <a:lnTo>
+                  <a:pt x="4109745" y="2792938"/>
+                </a:lnTo>
+                <a:lnTo>
+                  <a:pt x="4133639" y="2795678"/>
+                </a:lnTo>
+                <a:lnTo>
+                  <a:pt x="4157533" y="2798392"/>
+                </a:lnTo>
+                <a:lnTo>
+                  <a:pt x="4181427" y="2801080"/>
+                </a:lnTo>
+                <a:lnTo>
+                  <a:pt x="4205321" y="2803742"/>
+                </a:lnTo>
+                <a:lnTo>
+                  <a:pt x="4229214" y="2806379"/>
+                </a:lnTo>
+                <a:lnTo>
+                  <a:pt x="4253108" y="2808992"/>
+                </a:lnTo>
+                <a:lnTo>
+                  <a:pt x="4277002" y="2811580"/>
+                </a:lnTo>
+                <a:lnTo>
+                  <a:pt x="4300896" y="2814144"/>
+                </a:lnTo>
+                <a:lnTo>
+                  <a:pt x="4324790" y="2816685"/>
+                </a:lnTo>
+                <a:lnTo>
+                  <a:pt x="4348684" y="2819202"/>
+                </a:lnTo>
+                <a:lnTo>
+                  <a:pt x="4372578" y="2821696"/>
+                </a:lnTo>
+                <a:lnTo>
+                  <a:pt x="4396471" y="2824167"/>
+                </a:lnTo>
+                <a:lnTo>
+                  <a:pt x="4420365" y="2826616"/>
+                </a:lnTo>
+                <a:lnTo>
+                  <a:pt x="4444259" y="2829042"/>
+                </a:lnTo>
+                <a:lnTo>
+                  <a:pt x="4468153" y="2831447"/>
+                </a:lnTo>
+                <a:lnTo>
+                  <a:pt x="4492047" y="2833830"/>
+                </a:lnTo>
+                <a:lnTo>
+                  <a:pt x="4515941" y="2836192"/>
+                </a:lnTo>
+                <a:lnTo>
+                  <a:pt x="4539835" y="2838533"/>
+                </a:lnTo>
+                <a:lnTo>
+                  <a:pt x="4563729" y="2840853"/>
+                </a:lnTo>
+                <a:lnTo>
+                  <a:pt x="4587622" y="2843153"/>
+                </a:lnTo>
+                <a:lnTo>
+                  <a:pt x="4611516" y="2845433"/>
+                </a:lnTo>
+                <a:lnTo>
+                  <a:pt x="4635410" y="2847693"/>
+                </a:lnTo>
+                <a:lnTo>
+                  <a:pt x="4659304" y="2849933"/>
+                </a:lnTo>
+                <a:lnTo>
+                  <a:pt x="4683198" y="2852153"/>
+                </a:lnTo>
+                <a:lnTo>
+                  <a:pt x="4707092" y="2854355"/>
+                </a:lnTo>
+                <a:lnTo>
+                  <a:pt x="4730986" y="2856538"/>
+                </a:lnTo>
+                <a:lnTo>
+                  <a:pt x="4754880" y="2858702"/>
+                </a:lnTo>
+              </a:path>
+            </a:pathLst>
+          </a:custGeom>
+          <a:noFill/>
+          <a:ln w="38100">
+            <a:solidFill>
+              <a:srgbClr val="8EDBD4"/>
+            </a:solidFill>
+          </a:ln>
+          <a:effectLst/>
+        </p:spPr>
+        <p:txBody>
+          <a:bodyPr rtlCol="0" anchor="ctr"/>
+          <a:lstStyle/>
+          <a:p>
+            <a:pPr algn="ctr"/>
+          </a:p>
+        </p:txBody>
+      </p:sp>
+      <p:sp>
+        <p:nvSpPr>
+          <p:cNvPr id="38" name="C3-E04 text 36" descr="sci-ppt:o036"/>
           <p:cNvSpPr txBox="1"/>
           <p:nvPr/>
         </p:nvSpPr>
         <p:spPr>
           <a:xfrm>
-            <a:off x="8138160" y="1874519"/>
-            <a:ext cx="1554480" cy="365760"/>
+            <a:off x="7861688" y="1976845"/>
+            <a:ext cx="4114800" cy="231648"/>
           </a:xfrm>
           <a:prstGeom prst="rect">
             <a:avLst/>
@@ -3258,7 +4756,7 @@
           <a:effectLst/>
         </p:spPr>
         <p:txBody>
-          <a:bodyPr wrap="square" lIns="27432" rIns="27432" tIns="18288" bIns="18288" anchor="ctr">
+          <a:bodyPr wrap="none" lIns="18288" rIns="18288" tIns="18288" bIns="18288" anchor="t">
             <a:spAutoFit/>
           </a:bodyPr>
           <a:lstStyle/>
@@ -3269,49 +4767,59 @@
               </a:spcAft>
             </a:pPr>
             <a:r>
-              <a:rPr sz="1700" b="0" i="0">
+              <a:rPr sz="1200" b="0" i="0">
                 <a:solidFill>
-                  <a:srgbClr val="E7F0F3"/>
+                  <a:srgbClr val="8EDBD4"/>
                 </a:solidFill>
                 <a:latin typeface="Arial"/>
               </a:rPr>
-              <a:t>i: receiver</a:t>
-            </a:r>
-          </a:p>
-        </p:txBody>
-      </p:sp>
-      <p:cxnSp>
-        <p:nvCxnSpPr>
-          <p:cNvPr id="7" name="C3-E04 line 5" descr="sci-ppt:o005"/>
-          <p:cNvCxnSpPr/>
+              <a:t>p′ = ρ(Rⱼ²R̈ⱼ + 2RⱼṘⱼ²) / dᵢⱼ</a:t>
+            </a:r>
+          </a:p>
+        </p:txBody>
+      </p:sp>
+      <p:sp>
+        <p:nvSpPr>
+          <p:cNvPr id="39" name="C3-E04 round_rect 37" descr="sci-ppt:o037"/>
+          <p:cNvSpPr/>
           <p:nvPr/>
-        </p:nvCxnSpPr>
-        <p:spPr>
-          <a:xfrm>
-            <a:off x="2194560" y="3108960"/>
-            <a:ext cx="6492240" cy="0"/>
-          </a:xfrm>
-          <a:prstGeom prst="line">
+        </p:nvSpPr>
+        <p:spPr>
+          <a:xfrm>
+            <a:off x="365760" y="914400"/>
+            <a:ext cx="5669280" cy="4846320"/>
+          </a:xfrm>
+          <a:prstGeom prst="roundRect">
             <a:avLst/>
           </a:prstGeom>
-          <a:ln w="25400">
+          <a:solidFill>
+            <a:srgbClr val="213E4B"/>
+          </a:solidFill>
+          <a:ln w="20320">
             <a:solidFill>
               <a:srgbClr val="8EDBD4"/>
             </a:solidFill>
           </a:ln>
           <a:effectLst/>
         </p:spPr>
-      </p:cxnSp>
-      <p:sp>
-        <p:nvSpPr>
-          <p:cNvPr id="8" name="C3-E04 text 6" descr="sci-ppt:o006"/>
+        <p:txBody>
+          <a:bodyPr rtlCol="0" anchor="ctr"/>
+          <a:lstStyle/>
+          <a:p>
+            <a:pPr algn="ctr"/>
+          </a:p>
+        </p:txBody>
+      </p:sp>
+      <p:sp>
+        <p:nvSpPr>
+          <p:cNvPr id="40" name="C3-E04 text 38" descr="sci-ppt:o038"/>
           <p:cNvSpPr txBox="1"/>
           <p:nvPr/>
         </p:nvSpPr>
         <p:spPr>
           <a:xfrm>
-            <a:off x="4846320" y="3200400"/>
-            <a:ext cx="1828800" cy="365760"/>
+            <a:off x="475488" y="969264"/>
+            <a:ext cx="5449824" cy="254889"/>
           </a:xfrm>
           <a:prstGeom prst="rect">
             <a:avLst/>
@@ -3320,7 +4828,7 @@
           <a:effectLst/>
         </p:spPr>
         <p:txBody>
-          <a:bodyPr wrap="square" lIns="27432" rIns="27432" tIns="18288" bIns="18288" anchor="ctr">
+          <a:bodyPr wrap="none" lIns="18288" rIns="18288" tIns="18288" bIns="18288" anchor="t">
             <a:spAutoFit/>
           </a:bodyPr>
           <a:lstStyle/>
@@ -3331,32 +4839,136 @@
               </a:spcAft>
             </a:pPr>
             <a:r>
-              <a:rPr sz="1700" b="0" i="0">
+              <a:rPr sz="1350" b="1" i="0">
                 <a:solidFill>
-                  <a:srgbClr val="E7F0F3"/>
+                  <a:srgbClr val="8EDBD4"/>
                 </a:solidFill>
                 <a:latin typeface="Arial"/>
               </a:rPr>
-              <a:t>d_ij</a:t>
-            </a:r>
+              <a:t>Neighbours add pressure at i</a:t>
+            </a:r>
+          </a:p>
+        </p:txBody>
+      </p:sp>
+      <p:sp>
+        <p:nvSpPr>
+          <p:cNvPr id="41" name="C3-E04 ellipse 39" descr="sci-ppt:o039"/>
+          <p:cNvSpPr/>
+          <p:nvPr/>
+        </p:nvSpPr>
+        <p:spPr>
+          <a:xfrm>
+            <a:off x="2788920" y="2880360"/>
+            <a:ext cx="822960" cy="822960"/>
+          </a:xfrm>
+          <a:prstGeom prst="ellipse">
+            <a:avLst/>
+          </a:prstGeom>
+          <a:solidFill>
+            <a:srgbClr val="0C1820"/>
+          </a:solidFill>
+          <a:ln w="27940">
+            <a:solidFill>
+              <a:srgbClr val="F28BA0"/>
+            </a:solidFill>
+          </a:ln>
+          <a:effectLst/>
+        </p:spPr>
+        <p:txBody>
+          <a:bodyPr rtlCol="0" anchor="ctr"/>
+          <a:lstStyle/>
+          <a:p>
+            <a:pPr algn="ctr"/>
+          </a:p>
+        </p:txBody>
+      </p:sp>
+      <p:sp>
+        <p:nvSpPr>
+          <p:cNvPr id="42" name="C3-E04 text 40" descr="sci-ppt:o040"/>
+          <p:cNvSpPr txBox="1"/>
+          <p:nvPr/>
+        </p:nvSpPr>
+        <p:spPr>
+          <a:xfrm>
+            <a:off x="2834640" y="3154680"/>
+            <a:ext cx="731520" cy="262636"/>
+          </a:xfrm>
+          <a:prstGeom prst="rect">
+            <a:avLst/>
+          </a:prstGeom>
+          <a:noFill/>
+          <a:effectLst/>
+        </p:spPr>
+        <p:txBody>
+          <a:bodyPr wrap="none" lIns="18288" rIns="18288" tIns="18288" bIns="18288" anchor="t">
+            <a:spAutoFit/>
+          </a:bodyPr>
+          <a:lstStyle/>
+          <a:p>
+            <a:pPr algn="ctr">
+              <a:spcAft>
+                <a:spcPts val="0"/>
+              </a:spcAft>
+            </a:pPr>
+            <a:r>
+              <a:rPr sz="1400" b="1" i="0">
+                <a:solidFill>
+                  <a:srgbClr val="F28BA0"/>
+                </a:solidFill>
+                <a:latin typeface="Arial"/>
+              </a:rPr>
+              <a:t>i</a:t>
+            </a:r>
+          </a:p>
+        </p:txBody>
+      </p:sp>
+      <p:sp>
+        <p:nvSpPr>
+          <p:cNvPr id="43" name="C3-E04 ellipse 41" descr="sci-ppt:o041"/>
+          <p:cNvSpPr/>
+          <p:nvPr/>
+        </p:nvSpPr>
+        <p:spPr>
+          <a:xfrm>
+            <a:off x="4472738" y="2454582"/>
+            <a:ext cx="548640" cy="548640"/>
+          </a:xfrm>
+          <a:prstGeom prst="ellipse">
+            <a:avLst/>
+          </a:prstGeom>
+          <a:solidFill>
+            <a:srgbClr val="0C1820"/>
+          </a:solidFill>
+          <a:ln w="27940">
+            <a:solidFill>
+              <a:srgbClr val="F2B880"/>
+            </a:solidFill>
+          </a:ln>
+          <a:effectLst/>
+        </p:spPr>
+        <p:txBody>
+          <a:bodyPr rtlCol="0" anchor="ctr"/>
+          <a:lstStyle/>
+          <a:p>
+            <a:pPr algn="ctr"/>
           </a:p>
         </p:txBody>
       </p:sp>
       <p:cxnSp>
         <p:nvCxnSpPr>
-          <p:cNvPr id="9" name="C3-E04 arrow 7" descr="sci-ppt:o007"/>
+          <p:cNvPr id="44" name="C3-E04 arrow 42" descr="sci-ppt:o042"/>
           <p:cNvCxnSpPr/>
           <p:nvPr/>
         </p:nvCxnSpPr>
         <p:spPr>
-          <a:xfrm>
-            <a:off x="3108960" y="2057400"/>
-            <a:ext cx="4617719" cy="0"/>
+          <a:xfrm flipH="1">
+            <a:off x="3672990" y="2822725"/>
+            <a:ext cx="816292" cy="297106"/>
           </a:xfrm>
           <a:prstGeom prst="line">
             <a:avLst/>
           </a:prstGeom>
-          <a:ln w="25400">
+          <a:ln w="30480">
             <a:solidFill>
               <a:srgbClr val="8EDBD4"/>
             </a:solidFill>
@@ -3368,14 +4980,182 @@
       </p:cxnSp>
       <p:sp>
         <p:nvSpPr>
-          <p:cNvPr id="10" name="C3-E04 text 8" descr="sci-ppt:o008"/>
+          <p:cNvPr id="45" name="C3-E04 ellipse 43" descr="sci-ppt:o043"/>
+          <p:cNvSpPr/>
+          <p:nvPr/>
+        </p:nvSpPr>
+        <p:spPr>
+          <a:xfrm>
+            <a:off x="2488239" y="1814563"/>
+            <a:ext cx="548640" cy="548640"/>
+          </a:xfrm>
+          <a:prstGeom prst="ellipse">
+            <a:avLst/>
+          </a:prstGeom>
+          <a:solidFill>
+            <a:srgbClr val="0C1820"/>
+          </a:solidFill>
+          <a:ln w="27940">
+            <a:solidFill>
+              <a:srgbClr val="F2B880"/>
+            </a:solidFill>
+          </a:ln>
+          <a:effectLst/>
+        </p:spPr>
+        <p:txBody>
+          <a:bodyPr rtlCol="0" anchor="ctr"/>
+          <a:lstStyle/>
+          <a:p>
+            <a:pPr algn="ctr"/>
+          </a:p>
+        </p:txBody>
+      </p:sp>
+      <p:cxnSp>
+        <p:nvCxnSpPr>
+          <p:cNvPr id="46" name="C3-E04 arrow 44" descr="sci-ppt:o044"/>
+          <p:cNvCxnSpPr/>
+          <p:nvPr/>
+        </p:nvCxnSpPr>
+        <p:spPr>
+          <a:xfrm>
+            <a:off x="2856382" y="2346659"/>
+            <a:ext cx="172009" cy="472590"/>
+          </a:xfrm>
+          <a:prstGeom prst="line">
+            <a:avLst/>
+          </a:prstGeom>
+          <a:ln w="30480">
+            <a:solidFill>
+              <a:srgbClr val="8EDBD4"/>
+            </a:solidFill>
+            <a:headEnd type="none" w="med" len="med"/>
+            <a:tailEnd type="triangle" w="med" len="med"/>
+          </a:ln>
+          <a:effectLst/>
+        </p:spPr>
+      </p:cxnSp>
+      <p:sp>
+        <p:nvSpPr>
+          <p:cNvPr id="47" name="C3-E04 ellipse 45" descr="sci-ppt:o045"/>
+          <p:cNvSpPr/>
+          <p:nvPr/>
+        </p:nvSpPr>
+        <p:spPr>
+          <a:xfrm>
+            <a:off x="1293495" y="3611732"/>
+            <a:ext cx="548640" cy="548640"/>
+          </a:xfrm>
+          <a:prstGeom prst="ellipse">
+            <a:avLst/>
+          </a:prstGeom>
+          <a:solidFill>
+            <a:srgbClr val="0C1820"/>
+          </a:solidFill>
+          <a:ln w="27940">
+            <a:solidFill>
+              <a:srgbClr val="F2B880"/>
+            </a:solidFill>
+          </a:ln>
+          <a:effectLst/>
+        </p:spPr>
+        <p:txBody>
+          <a:bodyPr rtlCol="0" anchor="ctr"/>
+          <a:lstStyle/>
+          <a:p>
+            <a:pPr algn="ctr"/>
+          </a:p>
+        </p:txBody>
+      </p:sp>
+      <p:cxnSp>
+        <p:nvCxnSpPr>
+          <p:cNvPr id="48" name="C3-E04 arrow 46" descr="sci-ppt:o046"/>
+          <p:cNvCxnSpPr/>
+          <p:nvPr/>
+        </p:nvCxnSpPr>
+        <p:spPr>
+          <a:xfrm flipV="1">
+            <a:off x="1825592" y="3463848"/>
+            <a:ext cx="902217" cy="328381"/>
+          </a:xfrm>
+          <a:prstGeom prst="line">
+            <a:avLst/>
+          </a:prstGeom>
+          <a:ln w="30480">
+            <a:solidFill>
+              <a:srgbClr val="8EDBD4"/>
+            </a:solidFill>
+            <a:headEnd type="none" w="med" len="med"/>
+            <a:tailEnd type="triangle" w="med" len="med"/>
+          </a:ln>
+          <a:effectLst/>
+        </p:spPr>
+      </p:cxnSp>
+      <p:sp>
+        <p:nvSpPr>
+          <p:cNvPr id="49" name="C3-E04 ellipse 47" descr="sci-ppt:o047"/>
+          <p:cNvSpPr/>
+          <p:nvPr/>
+        </p:nvSpPr>
+        <p:spPr>
+          <a:xfrm>
+            <a:off x="3395194" y="4306402"/>
+            <a:ext cx="548640" cy="548640"/>
+          </a:xfrm>
+          <a:prstGeom prst="ellipse">
+            <a:avLst/>
+          </a:prstGeom>
+          <a:solidFill>
+            <a:srgbClr val="0C1820"/>
+          </a:solidFill>
+          <a:ln w="27940">
+            <a:solidFill>
+              <a:srgbClr val="F2B880"/>
+            </a:solidFill>
+          </a:ln>
+          <a:effectLst/>
+        </p:spPr>
+        <p:txBody>
+          <a:bodyPr rtlCol="0" anchor="ctr"/>
+          <a:lstStyle/>
+          <a:p>
+            <a:pPr algn="ctr"/>
+          </a:p>
+        </p:txBody>
+      </p:sp>
+      <p:cxnSp>
+        <p:nvCxnSpPr>
+          <p:cNvPr id="50" name="C3-E04 arrow 48" descr="sci-ppt:o048"/>
+          <p:cNvCxnSpPr/>
+          <p:nvPr/>
+        </p:nvCxnSpPr>
+        <p:spPr>
+          <a:xfrm flipH="1" flipV="1">
+            <a:off x="3372408" y="3764430"/>
+            <a:ext cx="203283" cy="558515"/>
+          </a:xfrm>
+          <a:prstGeom prst="line">
+            <a:avLst/>
+          </a:prstGeom>
+          <a:ln w="30480">
+            <a:solidFill>
+              <a:srgbClr val="8EDBD4"/>
+            </a:solidFill>
+            <a:headEnd type="none" w="med" len="med"/>
+            <a:tailEnd type="triangle" w="med" len="med"/>
+          </a:ln>
+          <a:effectLst/>
+        </p:spPr>
+      </p:cxnSp>
+      <p:sp>
+        <p:nvSpPr>
+          <p:cNvPr id="51" name="C3-E04 text 49" descr="sci-ppt:o049"/>
           <p:cNvSpPr txBox="1"/>
           <p:nvPr/>
         </p:nvSpPr>
         <p:spPr>
           <a:xfrm>
-            <a:off x="3749039" y="1600200"/>
-            <a:ext cx="3931920" cy="365760"/>
+            <a:off x="502920" y="4892040"/>
+            <a:ext cx="5303520" cy="417576"/>
           </a:xfrm>
           <a:prstGeom prst="rect">
             <a:avLst/>
@@ -3384,7 +5164,7 @@
           <a:effectLst/>
         </p:spPr>
         <p:txBody>
-          <a:bodyPr wrap="square" lIns="27432" rIns="27432" tIns="18288" bIns="18288" anchor="ctr">
+          <a:bodyPr wrap="none" lIns="18288" rIns="18288" tIns="18288" bIns="18288" anchor="t">
             <a:spAutoFit/>
           </a:bodyPr>
           <a:lstStyle/>
@@ -3395,27 +5175,43 @@
               </a:spcAft>
             </a:pPr>
             <a:r>
-              <a:rPr sz="1800" b="0" i="0">
+              <a:rPr sz="1200" b="0" i="0">
                 <a:solidFill>
                   <a:srgbClr val="E7F0F3"/>
                 </a:solidFill>
                 <a:latin typeface="Arial"/>
               </a:rPr>
-              <a:t>Shared liquid: ρ, p∞</a:t>
-            </a:r>
-          </a:p>
-        </p:txBody>
-      </p:sp>
-      <p:sp>
-        <p:nvSpPr>
-          <p:cNvPr id="11" name="C3-E04 text 9" descr="sci-ppt:o009"/>
+              <a:t>pₑₓₜ,i ≈ p∞ + Σ_{j≠i} p′_{j→i}: each source changes the</a:t>
+            </a:r>
+          </a:p>
+          <a:p>
+            <a:pPr algn="l">
+              <a:spcAft>
+                <a:spcPts val="0"/>
+              </a:spcAft>
+            </a:pPr>
+            <a:r>
+              <a:rPr sz="1200" b="0" i="0">
+                <a:solidFill>
+                  <a:srgbClr val="E7F0F3"/>
+                </a:solidFill>
+                <a:latin typeface="Arial"/>
+              </a:rPr>
+              <a:t>surrounding pressure; none adds energy.</a:t>
+            </a:r>
+          </a:p>
+        </p:txBody>
+      </p:sp>
+      <p:sp>
+        <p:nvSpPr>
+          <p:cNvPr id="52" name="C3-E04 text 50" descr="sci-ppt:o050"/>
           <p:cNvSpPr txBox="1"/>
           <p:nvPr/>
         </p:nvSpPr>
         <p:spPr>
           <a:xfrm>
-            <a:off x="548640" y="777240"/>
-            <a:ext cx="10972800" cy="411480"/>
+            <a:off x="6309360" y="5760720"/>
+            <a:ext cx="5486400" cy="402081"/>
           </a:xfrm>
           <a:prstGeom prst="rect">
             <a:avLst/>
@@ -3424,125 +5220,7 @@
           <a:effectLst/>
         </p:spPr>
         <p:txBody>
-          <a:bodyPr wrap="square" lIns="27432" rIns="27432" tIns="18288" bIns="18288" anchor="ctr">
-            <a:spAutoFit/>
-          </a:bodyPr>
-          <a:lstStyle/>
-          <a:p>
-            <a:pPr algn="l">
-              <a:spcAft>
-                <a:spcPts val="0"/>
-              </a:spcAft>
-            </a:pPr>
-            <a:r>
-              <a:rPr sz="1800" b="0" i="0">
-                <a:solidFill>
-                  <a:srgbClr val="E7F0F3"/>
-                </a:solidFill>
-                <a:latin typeface="Arial"/>
-              </a:rPr>
-              <a:t>Fixed centres; spherical cavities; R_i, R_j ≪ d_ij</a:t>
-            </a:r>
-          </a:p>
-        </p:txBody>
-      </p:sp>
-      <p:sp>
-        <p:nvSpPr>
-          <p:cNvPr id="12" name="C3-E04 text 10" descr="sci-ppt:o010"/>
-          <p:cNvSpPr txBox="1"/>
-          <p:nvPr/>
-        </p:nvSpPr>
-        <p:spPr>
-          <a:xfrm>
-            <a:off x="3657600" y="2423160"/>
-            <a:ext cx="4206240" cy="548640"/>
-          </a:xfrm>
-          <a:prstGeom prst="rect">
-            <a:avLst/>
-          </a:prstGeom>
-          <a:noFill/>
-          <a:effectLst/>
-        </p:spPr>
-        <p:txBody>
-          <a:bodyPr wrap="square" lIns="27432" rIns="27432" tIns="18288" bIns="18288" anchor="ctr">
-            <a:spAutoFit/>
-          </a:bodyPr>
-          <a:lstStyle/>
-          <a:p>
-            <a:pPr algn="l">
-              <a:spcAft>
-                <a:spcPts val="0"/>
-              </a:spcAft>
-            </a:pPr>
-            <a:r>
-              <a:rPr sz="1700" b="0" i="0">
-                <a:solidFill>
-                  <a:srgbClr val="8EDBD4"/>
-                </a:solidFill>
-                <a:latin typeface="Arial"/>
-              </a:rPr>
-              <a:t>Source-volume acceleration</a:t>
-            </a:r>
-          </a:p>
-          <a:p>
-            <a:pPr algn="l">
-              <a:spcAft>
-                <a:spcPts val="0"/>
-              </a:spcAft>
-            </a:pPr>
-            <a:r>
-              <a:rPr sz="1700" b="0" i="0">
-                <a:solidFill>
-                  <a:srgbClr val="8EDBD4"/>
-                </a:solidFill>
-                <a:latin typeface="Arial"/>
-              </a:rPr>
-              <a:t>sets the pressure correction.</a:t>
-            </a:r>
-          </a:p>
-        </p:txBody>
-      </p:sp>
-      <p:cxnSp>
-        <p:nvCxnSpPr>
-          <p:cNvPr id="13" name="C3-E04 line 11" descr="sci-ppt:o011"/>
-          <p:cNvCxnSpPr/>
-          <p:nvPr/>
-        </p:nvCxnSpPr>
-        <p:spPr>
-          <a:xfrm>
-            <a:off x="274320" y="3977639"/>
-            <a:ext cx="11612880" cy="0"/>
-          </a:xfrm>
-          <a:prstGeom prst="line">
-            <a:avLst/>
-          </a:prstGeom>
-          <a:ln w="12700">
-            <a:solidFill>
-              <a:srgbClr val="405967"/>
-            </a:solidFill>
-          </a:ln>
-          <a:effectLst/>
-        </p:spPr>
-      </p:cxnSp>
-      <p:sp>
-        <p:nvSpPr>
-          <p:cNvPr id="14" name="C3-E04 text 12" descr="sci-ppt:o012"/>
-          <p:cNvSpPr txBox="1"/>
-          <p:nvPr/>
-        </p:nvSpPr>
-        <p:spPr>
-          <a:xfrm>
-            <a:off x="320040" y="4096512"/>
-            <a:ext cx="5715000" cy="246888"/>
-          </a:xfrm>
-          <a:prstGeom prst="rect">
-            <a:avLst/>
-          </a:prstGeom>
-          <a:noFill/>
-          <a:effectLst/>
-        </p:spPr>
-        <p:txBody>
-          <a:bodyPr wrap="square" lIns="27432" rIns="27432" tIns="18288" bIns="18288" anchor="ctr">
+          <a:bodyPr wrap="none" lIns="18288" rIns="18288" tIns="18288" bIns="18288" anchor="t">
             <a:spAutoFit/>
           </a:bodyPr>
           <a:lstStyle/>
@@ -3559,33 +5237,9 @@
                 </a:solidFill>
                 <a:latin typeface="Arial"/>
               </a:rPr>
-              <a:t>• j source → i receiver</a:t>
-            </a:r>
-          </a:p>
-        </p:txBody>
-      </p:sp>
-      <p:sp>
-        <p:nvSpPr>
-          <p:cNvPr id="15" name="C3-E04 text 13" descr="sci-ppt:o013"/>
-          <p:cNvSpPr txBox="1"/>
-          <p:nvPr/>
-        </p:nvSpPr>
-        <p:spPr>
-          <a:xfrm>
-            <a:off x="6217920" y="4096512"/>
-            <a:ext cx="5715000" cy="246888"/>
-          </a:xfrm>
-          <a:prstGeom prst="rect">
-            <a:avLst/>
-          </a:prstGeom>
-          <a:noFill/>
-          <a:effectLst/>
-        </p:spPr>
-        <p:txBody>
-          <a:bodyPr wrap="square" lIns="27432" rIns="27432" tIns="18288" bIns="18288" anchor="ctr">
-            <a:spAutoFit/>
-          </a:bodyPr>
-          <a:lstStyle/>
+              <a:t>Snapshot of fastest wall acceleration of a 5 µm bubble: R = 5.0 µm, Ṙ</a:t>
+            </a:r>
+          </a:p>
           <a:p>
             <a:pPr algn="l">
               <a:spcAft>
@@ -3599,21 +5253,21 @@
                 </a:solidFill>
                 <a:latin typeface="Arial"/>
               </a:rPr>
-              <a:t>• R_j, Ṙ_j, R̈_j</a:t>
-            </a:r>
-          </a:p>
-        </p:txBody>
-      </p:sp>
-      <p:sp>
-        <p:nvSpPr>
-          <p:cNvPr id="16" name="C3-E04 text 14" descr="sci-ppt:o014"/>
+              <a:t>= 1 m/s, R̈ = 1.7e+08 m/s².</a:t>
+            </a:r>
+          </a:p>
+        </p:txBody>
+      </p:sp>
+      <p:sp>
+        <p:nvSpPr>
+          <p:cNvPr id="53" name="C3-E04 text 51" descr="sci-ppt:o051"/>
           <p:cNvSpPr txBox="1"/>
           <p:nvPr/>
         </p:nvSpPr>
         <p:spPr>
           <a:xfrm>
-            <a:off x="320040" y="4329684"/>
-            <a:ext cx="5715000" cy="246888"/>
+            <a:off x="320040" y="6510528"/>
+            <a:ext cx="11521440" cy="200660"/>
           </a:xfrm>
           <a:prstGeom prst="rect">
             <a:avLst/>
@@ -3622,247 +5276,7 @@
           <a:effectLst/>
         </p:spPr>
         <p:txBody>
-          <a:bodyPr wrap="square" lIns="27432" rIns="27432" tIns="18288" bIns="18288" anchor="ctr">
-            <a:spAutoFit/>
-          </a:bodyPr>
-          <a:lstStyle/>
-          <a:p>
-            <a:pPr algn="l">
-              <a:spcAft>
-                <a:spcPts val="0"/>
-              </a:spcAft>
-            </a:pPr>
-            <a:r>
-              <a:rPr sz="1150" b="0" i="0">
-                <a:solidFill>
-                  <a:srgbClr val="B4C7D2"/>
-                </a:solidFill>
-                <a:latin typeface="Arial"/>
-              </a:rPr>
-              <a:t>• d_ij center separation</a:t>
-            </a:r>
-          </a:p>
-        </p:txBody>
-      </p:sp>
-      <p:sp>
-        <p:nvSpPr>
-          <p:cNvPr id="17" name="C3-E04 text 15" descr="sci-ppt:o015"/>
-          <p:cNvSpPr txBox="1"/>
-          <p:nvPr/>
-        </p:nvSpPr>
-        <p:spPr>
-          <a:xfrm>
-            <a:off x="6217920" y="4329684"/>
-            <a:ext cx="5715000" cy="246888"/>
-          </a:xfrm>
-          <a:prstGeom prst="rect">
-            <a:avLst/>
-          </a:prstGeom>
-          <a:noFill/>
-          <a:effectLst/>
-        </p:spPr>
-        <p:txBody>
-          <a:bodyPr wrap="square" lIns="27432" rIns="27432" tIns="18288" bIns="18288" anchor="ctr">
-            <a:spAutoFit/>
-          </a:bodyPr>
-          <a:lstStyle/>
-          <a:p>
-            <a:pPr algn="l">
-              <a:spcAft>
-                <a:spcPts val="0"/>
-              </a:spcAft>
-            </a:pPr>
-            <a:r>
-              <a:rPr sz="1150" b="0" i="0">
-                <a:solidFill>
-                  <a:srgbClr val="B4C7D2"/>
-                </a:solidFill>
-                <a:latin typeface="Arial"/>
-              </a:rPr>
-              <a:t>• p′_j→i near receiver</a:t>
-            </a:r>
-          </a:p>
-        </p:txBody>
-      </p:sp>
-      <p:sp>
-        <p:nvSpPr>
-          <p:cNvPr id="18" name="C3-E04 text 16" descr="sci-ppt:o016"/>
-          <p:cNvSpPr txBox="1"/>
-          <p:nvPr/>
-        </p:nvSpPr>
-        <p:spPr>
-          <a:xfrm>
-            <a:off x="320040" y="4562856"/>
-            <a:ext cx="5715000" cy="246888"/>
-          </a:xfrm>
-          <a:prstGeom prst="rect">
-            <a:avLst/>
-          </a:prstGeom>
-          <a:noFill/>
-          <a:effectLst/>
-        </p:spPr>
-        <p:txBody>
-          <a:bodyPr wrap="square" lIns="27432" rIns="27432" tIns="18288" bIns="18288" anchor="ctr">
-            <a:spAutoFit/>
-          </a:bodyPr>
-          <a:lstStyle/>
-          <a:p>
-            <a:pPr algn="l">
-              <a:spcAft>
-                <a:spcPts val="0"/>
-              </a:spcAft>
-            </a:pPr>
-            <a:r>
-              <a:rPr sz="1150" b="0" i="0">
-                <a:solidFill>
-                  <a:srgbClr val="B4C7D2"/>
-                </a:solidFill>
-                <a:latin typeface="Arial"/>
-              </a:rPr>
-              <a:t>• p_ext,i = p∞ + Σ p′</a:t>
-            </a:r>
-          </a:p>
-        </p:txBody>
-      </p:sp>
-      <p:sp>
-        <p:nvSpPr>
-          <p:cNvPr id="19" name="C3-E04 text 17" descr="sci-ppt:o017"/>
-          <p:cNvSpPr txBox="1"/>
-          <p:nvPr/>
-        </p:nvSpPr>
-        <p:spPr>
-          <a:xfrm>
-            <a:off x="6217920" y="4562856"/>
-            <a:ext cx="5715000" cy="246888"/>
-          </a:xfrm>
-          <a:prstGeom prst="rect">
-            <a:avLst/>
-          </a:prstGeom>
-          <a:noFill/>
-          <a:effectLst/>
-        </p:spPr>
-        <p:txBody>
-          <a:bodyPr wrap="square" lIns="27432" rIns="27432" tIns="18288" bIns="18288" anchor="ctr">
-            <a:spAutoFit/>
-          </a:bodyPr>
-          <a:lstStyle/>
-          <a:p>
-            <a:pPr algn="l">
-              <a:spcAft>
-                <a:spcPts val="0"/>
-              </a:spcAft>
-            </a:pPr>
-            <a:r>
-              <a:rPr sz="1150" b="0" i="0">
-                <a:solidFill>
-                  <a:srgbClr val="B4C7D2"/>
-                </a:solidFill>
-                <a:latin typeface="Arial"/>
-              </a:rPr>
-              <a:t>• ρ, φ_j, ∂ₜ, t, N_b: field legend</a:t>
-            </a:r>
-          </a:p>
-        </p:txBody>
-      </p:sp>
-      <p:sp>
-        <p:nvSpPr>
-          <p:cNvPr id="20" name="C3-E04 text 18" descr="sci-ppt:o018"/>
-          <p:cNvSpPr txBox="1"/>
-          <p:nvPr/>
-        </p:nvSpPr>
-        <p:spPr>
-          <a:xfrm>
-            <a:off x="320040" y="5596128"/>
-            <a:ext cx="11430000" cy="292608"/>
-          </a:xfrm>
-          <a:prstGeom prst="rect">
-            <a:avLst/>
-          </a:prstGeom>
-          <a:noFill/>
-          <a:effectLst/>
-        </p:spPr>
-        <p:txBody>
-          <a:bodyPr wrap="square" lIns="27432" rIns="27432" tIns="18288" bIns="18288" anchor="ctr">
-            <a:spAutoFit/>
-          </a:bodyPr>
-          <a:lstStyle/>
-          <a:p>
-            <a:pPr algn="l">
-              <a:spcAft>
-                <a:spcPts val="0"/>
-              </a:spcAft>
-            </a:pPr>
-            <a:r>
-              <a:rPr sz="1150" b="0" i="0">
-                <a:solidFill>
-                  <a:srgbClr val="8EDBD4"/>
-                </a:solidFill>
-                <a:latin typeface="Arial"/>
-              </a:rPr>
-              <a:t>Positive source-volume acceleration raises surrounding pressure</a:t>
-            </a:r>
-          </a:p>
-        </p:txBody>
-      </p:sp>
-      <p:sp>
-        <p:nvSpPr>
-          <p:cNvPr id="21" name="C3-E04 text 19" descr="sci-ppt:o019"/>
-          <p:cNvSpPr txBox="1"/>
-          <p:nvPr/>
-        </p:nvSpPr>
-        <p:spPr>
-          <a:xfrm>
-            <a:off x="320040" y="5870448"/>
-            <a:ext cx="11430000" cy="292608"/>
-          </a:xfrm>
-          <a:prstGeom prst="rect">
-            <a:avLst/>
-          </a:prstGeom>
-          <a:noFill/>
-          <a:effectLst/>
-        </p:spPr>
-        <p:txBody>
-          <a:bodyPr wrap="square" lIns="27432" rIns="27432" tIns="18288" bIns="18288" anchor="ctr">
-            <a:spAutoFit/>
-          </a:bodyPr>
-          <a:lstStyle/>
-          <a:p>
-            <a:pPr algn="l">
-              <a:spcAft>
-                <a:spcPts val="0"/>
-              </a:spcAft>
-            </a:pPr>
-            <a:r>
-              <a:rPr sz="1150" b="0" i="0">
-                <a:solidFill>
-                  <a:srgbClr val="8EDBD4"/>
-                </a:solidFill>
-                <a:latin typeface="Arial"/>
-              </a:rPr>
-              <a:t>Convective cross terms and shape gradients omitted</a:t>
-            </a:r>
-          </a:p>
-        </p:txBody>
-      </p:sp>
-      <p:sp>
-        <p:nvSpPr>
-          <p:cNvPr id="22" name="C3-E04 text 20" descr="sci-ppt:o020"/>
-          <p:cNvSpPr txBox="1"/>
-          <p:nvPr/>
-        </p:nvSpPr>
-        <p:spPr>
-          <a:xfrm>
-            <a:off x="320040" y="6473952"/>
-            <a:ext cx="11430000" cy="256032"/>
-          </a:xfrm>
-          <a:prstGeom prst="rect">
-            <a:avLst/>
-          </a:prstGeom>
-          <a:noFill/>
-          <a:effectLst/>
-        </p:spPr>
-        <p:txBody>
-          <a:bodyPr wrap="square" lIns="27432" rIns="27432" tIns="18288" bIns="18288" anchor="ctr">
+          <a:bodyPr wrap="none" lIns="18288" rIns="18288" tIns="18288" bIns="18288" anchor="t">
             <a:spAutoFit/>
           </a:bodyPr>
           <a:lstStyle/>
@@ -3879,7 +5293,7 @@
                 </a:solidFill>
                 <a:latin typeface="Arial"/>
               </a:rPr>
-              <a:t>Model schematic; geometry is not to scale.</a:t>
+              <a:t>Leading unsteady-Bernoulli correction of Eq. C3-E04; snapshot from a Rayleigh–Plesset run (p_g0 = 1 MPa).</a:t>
             </a:r>
           </a:p>
         </p:txBody>
